--- a/presentations/Day 5 - From ML to AI-Enabled Workflows/03_guided_llm_prompt_recreate_ml_notebook.pptx
+++ b/presentations/Day 5 - From ML to AI-Enabled Workflows/03_guided_llm_prompt_recreate_ml_notebook.pptx
@@ -7919,7 +7919,7 @@
         </p:nvSpPr>
         <p:spPr>
           <a:xfrm>
-            <a:off x="777240" y="2907792"/>
+            <a:off x="704088" y="2907792"/>
             <a:ext cx="1417320" cy="676656"/>
           </a:xfrm>
           <a:prstGeom prst="roundRect">
@@ -8010,14 +8010,14 @@
               <a:buNone/>
             </a:pPr>
             <a:r>
-              <a:rPr lang="en-US" sz="880" dirty="0">
+              <a:rPr lang="en-US" sz="1200" dirty="0">
                 <a:solidFill>
                   <a:srgbClr val="EAF0F5"/>
                 </a:solidFill>
               </a:rPr>
               <a:t>evidence</a:t>
             </a:r>
-            <a:endParaRPr lang="en-US" sz="880" dirty="0"/>
+            <a:endParaRPr lang="en-US" sz="1200" dirty="0"/>
           </a:p>
         </p:txBody>
       </p:sp>
@@ -8120,14 +8120,14 @@
               <a:buNone/>
             </a:pPr>
             <a:r>
-              <a:rPr lang="en-US" sz="880" dirty="0">
+              <a:rPr lang="en-US" sz="1200" dirty="0">
                 <a:solidFill>
                   <a:srgbClr val="EAF0F5"/>
                 </a:solidFill>
               </a:rPr>
               <a:t>drafts</a:t>
             </a:r>
-            <a:endParaRPr lang="en-US" sz="880" dirty="0"/>
+            <a:endParaRPr lang="en-US" sz="1200" dirty="0"/>
           </a:p>
         </p:txBody>
       </p:sp>
@@ -8230,14 +8230,14 @@
               <a:buNone/>
             </a:pPr>
             <a:r>
-              <a:rPr lang="en-US" sz="880" dirty="0">
+              <a:rPr lang="en-US" sz="1200" dirty="0">
                 <a:solidFill>
                   <a:srgbClr val="EAF0F5"/>
                 </a:solidFill>
               </a:rPr>
               <a:t>runs</a:t>
             </a:r>
-            <a:endParaRPr lang="en-US" sz="880" dirty="0"/>
+            <a:endParaRPr lang="en-US" sz="1200" dirty="0"/>
           </a:p>
         </p:txBody>
       </p:sp>
@@ -8340,14 +8340,14 @@
               <a:buNone/>
             </a:pPr>
             <a:r>
-              <a:rPr lang="en-US" sz="880" dirty="0">
+              <a:rPr lang="en-US" sz="1200" dirty="0">
                 <a:solidFill>
                   <a:srgbClr val="EAF0F5"/>
                 </a:solidFill>
               </a:rPr>
               <a:t>evaluate</a:t>
             </a:r>
-            <a:endParaRPr lang="en-US" sz="880" dirty="0"/>
+            <a:endParaRPr lang="en-US" sz="1200" dirty="0"/>
           </a:p>
         </p:txBody>
       </p:sp>
@@ -8450,14 +8450,14 @@
               <a:buNone/>
             </a:pPr>
             <a:r>
-              <a:rPr lang="en-US" sz="880" dirty="0">
+              <a:rPr lang="en-US" sz="1200" dirty="0">
                 <a:solidFill>
                   <a:srgbClr val="EAF0F5"/>
                 </a:solidFill>
               </a:rPr>
               <a:t>validates</a:t>
             </a:r>
-            <a:endParaRPr lang="en-US" sz="880" dirty="0"/>
+            <a:endParaRPr lang="en-US" sz="1200" dirty="0"/>
           </a:p>
         </p:txBody>
       </p:sp>
@@ -9904,14 +9904,14 @@
               <a:buNone/>
             </a:pPr>
             <a:r>
-              <a:rPr lang="en-US" sz="880" dirty="0">
+              <a:rPr lang="en-US" sz="1200" dirty="0">
                 <a:solidFill>
                   <a:srgbClr val="EAF0F5"/>
                 </a:solidFill>
               </a:rPr>
               <a:t>problem</a:t>
             </a:r>
-            <a:endParaRPr lang="en-US" sz="880" dirty="0"/>
+            <a:endParaRPr lang="en-US" sz="1200" dirty="0"/>
           </a:p>
         </p:txBody>
       </p:sp>
@@ -10014,14 +10014,14 @@
               <a:buNone/>
             </a:pPr>
             <a:r>
-              <a:rPr lang="en-US" sz="880" dirty="0">
+              <a:rPr lang="en-US" sz="1200" dirty="0">
                 <a:solidFill>
                   <a:srgbClr val="EAF0F5"/>
                 </a:solidFill>
               </a:rPr>
               <a:t>data</a:t>
             </a:r>
-            <a:endParaRPr lang="en-US" sz="880" dirty="0"/>
+            <a:endParaRPr lang="en-US" sz="1200" dirty="0"/>
           </a:p>
         </p:txBody>
       </p:sp>
@@ -10124,14 +10124,14 @@
               <a:buNone/>
             </a:pPr>
             <a:r>
-              <a:rPr lang="en-US" sz="880" dirty="0">
+              <a:rPr lang="en-US" sz="1200" dirty="0">
                 <a:solidFill>
                   <a:srgbClr val="EAF0F5"/>
                 </a:solidFill>
               </a:rPr>
               <a:t>leakage</a:t>
             </a:r>
-            <a:endParaRPr lang="en-US" sz="880" dirty="0"/>
+            <a:endParaRPr lang="en-US" sz="1200" dirty="0"/>
           </a:p>
         </p:txBody>
       </p:sp>
@@ -10234,14 +10234,14 @@
               <a:buNone/>
             </a:pPr>
             <a:r>
-              <a:rPr lang="en-US" sz="880" dirty="0">
+              <a:rPr lang="en-US" sz="1200" dirty="0">
                 <a:solidFill>
                   <a:srgbClr val="EAF0F5"/>
                 </a:solidFill>
               </a:rPr>
               <a:t>features</a:t>
             </a:r>
-            <a:endParaRPr lang="en-US" sz="880" dirty="0"/>
+            <a:endParaRPr lang="en-US" sz="1200" dirty="0"/>
           </a:p>
         </p:txBody>
       </p:sp>
@@ -10344,14 +10344,14 @@
               <a:buNone/>
             </a:pPr>
             <a:r>
-              <a:rPr lang="en-US" sz="880" dirty="0">
+              <a:rPr lang="en-US" sz="1200" dirty="0">
                 <a:solidFill>
                   <a:srgbClr val="EAF0F5"/>
                 </a:solidFill>
               </a:rPr>
               <a:t>pipeline</a:t>
             </a:r>
-            <a:endParaRPr lang="en-US" sz="880" dirty="0"/>
+            <a:endParaRPr lang="en-US" sz="1200" dirty="0"/>
           </a:p>
         </p:txBody>
       </p:sp>
@@ -10454,14 +10454,14 @@
               <a:buNone/>
             </a:pPr>
             <a:r>
-              <a:rPr lang="en-US" sz="880" dirty="0">
+              <a:rPr lang="en-US" sz="1200" dirty="0">
                 <a:solidFill>
                   <a:srgbClr val="EAF0F5"/>
                 </a:solidFill>
               </a:rPr>
               <a:t>metrics</a:t>
             </a:r>
-            <a:endParaRPr lang="en-US" sz="880" dirty="0"/>
+            <a:endParaRPr lang="en-US" sz="1200" dirty="0"/>
           </a:p>
         </p:txBody>
       </p:sp>
@@ -10564,14 +10564,14 @@
               <a:buNone/>
             </a:pPr>
             <a:r>
-              <a:rPr lang="en-US" sz="880" dirty="0">
+              <a:rPr lang="en-US" sz="1200" dirty="0">
                 <a:solidFill>
                   <a:srgbClr val="EAF0F5"/>
                 </a:solidFill>
               </a:rPr>
               <a:t>results</a:t>
             </a:r>
-            <a:endParaRPr lang="en-US" sz="880" dirty="0"/>
+            <a:endParaRPr lang="en-US" sz="1200" dirty="0"/>
           </a:p>
         </p:txBody>
       </p:sp>
